--- a/examples/presentation-maker/output/presentation.pptx
+++ b/examples/presentation-maker/output/presentation.pptx
@@ -671,7 +671,7 @@
           <a:lstStyle/>
           <a:p>
             <a:r>
-              <a:t>依第 2 節，會議紀錄和 CSV 已完成模擬演練。收據欄位尚未全部確認，不得說成十個技能均已上線。</a:t>
+              <a:t>依第 2 節，會議紀錄和 CSV 已完成模擬演練。收據欄位尚未全部確認，不得說成全部技能均已上線。</a:t>
             </a:r>
           </a:p>
           <a:p/>
